--- a/docs/AutoGrader.pptx
+++ b/docs/AutoGrader.pptx
@@ -585,7 +585,7 @@
           <a:lstStyle/>
           <a:p>
             <a:r>
-              <a:t>The report explains every point. Each finding has a severity, a file path and a fix. On the right are real findings from the sample repository, including a hard-coded database credential, root containers and debug mode. The learning path turns the grade into a lesson.</a:t>
+              <a:t>The report explains every point in plain language. Each finding has a severity, the files it appears in, and a fix. On the right are real findings from the sample repository, including a hard-coded database credential and root containers. The learning path turns the grade into a lesson. Technical details such as latency stay on the instructor's Platform health page, so students are not distracted by them.</a:t>
             </a:r>
           </a:p>
         </p:txBody>
@@ -5658,7 +5658,7 @@
                 </a:solidFill>
                 <a:latin typeface="Segoe UI"/>
               </a:rPr>
-              <a:t>Latency section</a:t>
+              <a:t>Grouped fixes</a:t>
             </a:r>
           </a:p>
           <a:p>
@@ -5670,7 +5670,7 @@
                 </a:solidFill>
                 <a:latin typeface="Segoe UI"/>
               </a:rPr>
-              <a:t>waterfall, critical path, speed-up, tokens</a:t>
+              <a:t>one issue in 5 files = one item, with every file listed</a:t>
             </a:r>
           </a:p>
         </p:txBody>
@@ -5739,7 +5739,7 @@
                 </a:solidFill>
                 <a:latin typeface="Segoe UI"/>
               </a:rPr>
-              <a:t>HTML (accessible) · Markdown · JSON API</a:t>
+              <a:t>in-app feedback page · printable HTML · Markdown · JSON</a:t>
             </a:r>
           </a:p>
         </p:txBody>
@@ -6092,7 +6092,7 @@
                 </a:solidFill>
                 <a:latin typeface="Segoe UI"/>
               </a:rPr>
-              <a:t>Secrets are redacted before any content reaches the LLM or the report.</a:t>
+              <a:t>Students see plain-language feedback only. Engine latency and metrics live on the instructor's Platform health page.</a:t>
             </a:r>
           </a:p>
         </p:txBody>

--- a/docs/AutoGrader.pptx
+++ b/docs/AutoGrader.pptx
@@ -730,7 +730,7 @@
           <a:lstStyle/>
           <a:p>
             <a:r>
-              <a:t>Security covers both the grader, which runs untrusted student code, and the platform. Repository input is restricted, secrets are redacted before anything reaches a model, and the Docker sandbox is locked down. On the platform side, roles are checked on the server for every instructor action, so a student cannot change any grade, sign-in is throttled against password guessing, and the public demo instructor cannot change anything. We verified these with an automated script of 47 checks.</a:t>
+              <a:t>Security covers both the grader, which runs untrusted student code, and the platform. Repository input is restricted, secrets are redacted before anything reaches a model, and the Docker sandbox is locked down. On the platform side, roles are checked on the server for every instructor action, so a student cannot change any grade, sign-in is throttled against password guessing, and the public demo instructor cannot change anything. We verified these with an automated script of 51 checks.</a:t>
             </a:r>
           </a:p>
         </p:txBody>
@@ -6989,7 +6989,7 @@
         </p:nvGraphicFramePr>
         <p:xfrm>
           <a:off x="548640" y="1371600"/>
-          <a:ext cx="11109960" cy="4297679"/>
+          <a:ext cx="11109960" cy="4526280"/>
         </p:xfrm>
         <a:graphic>
           <a:graphicData uri="http://schemas.openxmlformats.org/drawingml/2006/table">
@@ -7001,7 +7001,7 @@
                 <a:gridCol w="3291840"/>
                 <a:gridCol w="7818120"/>
               </a:tblGrid>
-              <a:tr h="429767">
+              <a:tr h="411480">
                 <a:tc>
                   <a:txBody>
                     <a:bodyPr wrap="square"/>
@@ -7047,7 +7047,7 @@
                   </a:tcPr>
                 </a:tc>
               </a:tr>
-              <a:tr h="429767">
+              <a:tr h="411480">
                 <a:tc>
                   <a:txBody>
                     <a:bodyPr wrap="square"/>
@@ -7093,7 +7093,7 @@
                   </a:tcPr>
                 </a:tc>
               </a:tr>
-              <a:tr h="429767">
+              <a:tr h="411480">
                 <a:tc>
                   <a:txBody>
                     <a:bodyPr wrap="square"/>
@@ -7139,7 +7139,7 @@
                   </a:tcPr>
                 </a:tc>
               </a:tr>
-              <a:tr h="429767">
+              <a:tr h="411480">
                 <a:tc>
                   <a:txBody>
                     <a:bodyPr wrap="square"/>
@@ -7185,7 +7185,7 @@
                   </a:tcPr>
                 </a:tc>
               </a:tr>
-              <a:tr h="429767">
+              <a:tr h="411480">
                 <a:tc>
                   <a:txBody>
                     <a:bodyPr wrap="square"/>
@@ -7231,7 +7231,7 @@
                   </a:tcPr>
                 </a:tc>
               </a:tr>
-              <a:tr h="429767">
+              <a:tr h="411480">
                 <a:tc>
                   <a:txBody>
                     <a:bodyPr wrap="square"/>
@@ -7244,7 +7244,7 @@
                           </a:solidFill>
                           <a:latin typeface="Segoe UI Semibold"/>
                         </a:rPr>
-                        <a:t>Students changing grades</a:t>
+                        <a:t>Students reading others' data</a:t>
                       </a:r>
                     </a:p>
                   </a:txBody>
@@ -7266,7 +7266,7 @@
                           </a:solidFill>
                           <a:latin typeface="Segoe UI"/>
                         </a:rPr>
-                        <a:t>every instructor route checks the role on the server; no student endpoint writes a score</a:t>
+                        <a:t>every instructor route checks the role on the server; reports only for their owner</a:t>
                       </a:r>
                     </a:p>
                   </a:txBody>
@@ -7277,7 +7277,7 @@
                   </a:tcPr>
                 </a:tc>
               </a:tr>
-              <a:tr h="429767">
+              <a:tr h="411480">
                 <a:tc>
                   <a:txBody>
                     <a:bodyPr wrap="square"/>
@@ -7312,7 +7312,7 @@
                           </a:solidFill>
                           <a:latin typeface="Segoe UI"/>
                         </a:rPr>
-                        <a:t>sign-in throttled per IP and per account; join codes throttled; constant-time comparisons</a:t>
+                        <a:t>throttled per client IP (Cloudflare header, never forgeable X-Forwarded-For) and per account</a:t>
                       </a:r>
                     </a:p>
                   </a:txBody>
@@ -7323,7 +7323,7 @@
                   </a:tcPr>
                 </a:tc>
               </a:tr>
-              <a:tr h="429767">
+              <a:tr h="411480">
                 <a:tc>
                   <a:txBody>
                     <a:bodyPr wrap="square"/>
@@ -7358,7 +7358,7 @@
                           </a:solidFill>
                           <a:latin typeface="Segoe UI"/>
                         </a:rPr>
-                        <a:t>demo instructor is read-only on the server; real students' emails hidden from it</a:t>
+                        <a:t>sign-up closed in demo mode; demo instructor read-only on the server</a:t>
                       </a:r>
                     </a:p>
                   </a:txBody>
@@ -7369,7 +7369,53 @@
                   </a:tcPr>
                 </a:tc>
               </a:tr>
-              <a:tr h="429767">
+              <a:tr h="411480">
+                <a:tc>
+                  <a:txBody>
+                    <a:bodyPr wrap="square"/>
+                    <a:lstStyle/>
+                    <a:p>
+                      <a:r>
+                        <a:rPr sz="1250" b="1">
+                          <a:solidFill>
+                            <a:srgbClr val="141C2E"/>
+                          </a:solidFill>
+                          <a:latin typeface="Segoe UI Semibold"/>
+                        </a:rPr>
+                        <a:t>Grade tampering</a:t>
+                      </a:r>
+                    </a:p>
+                  </a:txBody>
+                  <a:tcPr marL="73152" marR="73152" marT="27432" marB="27432">
+                    <a:solidFill>
+                      <a:srgbClr val="FFFFFF"/>
+                    </a:solidFill>
+                  </a:tcPr>
+                </a:tc>
+                <a:tc>
+                  <a:txBody>
+                    <a:bodyPr wrap="square"/>
+                    <a:lstStyle/>
+                    <a:p>
+                      <a:r>
+                        <a:rPr sz="1250" b="0">
+                          <a:solidFill>
+                            <a:srgbClr val="4A5468"/>
+                          </a:solidFill>
+                          <a:latin typeface="Segoe UI"/>
+                        </a:rPr>
+                        <a:t>adjusted grade pinned in every view until restored; no student endpoint writes a score</a:t>
+                      </a:r>
+                    </a:p>
+                  </a:txBody>
+                  <a:tcPr marL="73152" marR="73152" marT="27432" marB="27432">
+                    <a:solidFill>
+                      <a:srgbClr val="FFFFFF"/>
+                    </a:solidFill>
+                  </a:tcPr>
+                </a:tc>
+              </a:tr>
+              <a:tr h="411480">
                 <a:tc>
                   <a:txBody>
                     <a:bodyPr wrap="square"/>
@@ -7415,7 +7461,7 @@
                   </a:tcPr>
                 </a:tc>
               </a:tr>
-              <a:tr h="429776">
+              <a:tr h="411480">
                 <a:tc>
                   <a:txBody>
                     <a:bodyPr wrap="square"/>

--- a/docs/AutoGrader.pptx
+++ b/docs/AutoGrader.pptx
@@ -730,7 +730,7 @@
           <a:lstStyle/>
           <a:p>
             <a:r>
-              <a:t>Security covers both the grader, which runs untrusted student code, and the platform. Repository input is restricted, secrets are redacted before anything reaches a model, and the Docker sandbox is locked down. On the platform side, roles are checked on the server for every instructor action, so a student cannot change any grade, sign-in is throttled against password guessing, and the public demo instructor cannot change anything. We verified these with an automated script of 51 checks.</a:t>
+              <a:t>Security covers both the grader, which runs untrusted student code, and the platform. Repository input is restricted, secrets are redacted before anything reaches a model, and the Docker sandbox is locked down. On the platform side, roles are checked on the server for every instructor action, so a student cannot change any grade, sign-in is throttled against password guessing, and the public demo has only a student login. We verified these with an automated script of 44 checks.</a:t>
             </a:r>
           </a:p>
         </p:txBody>
@@ -7358,7 +7358,7 @@
                           </a:solidFill>
                           <a:latin typeface="Segoe UI"/>
                         </a:rPr>
-                        <a:t>sign-up closed in demo mode; demo instructor read-only on the server</a:t>
+                        <a:t>only a demo student login is public; sign-up closed; demo logins read-only</a:t>
                       </a:r>
                     </a:p>
                   </a:txBody>
@@ -11086,7 +11086,7 @@
                 </a:solidFill>
                 <a:latin typeface="Segoe UI"/>
               </a:rPr>
-              <a:t>Sign in → Instructor view (read-only demo)</a:t>
+              <a:t>Sign in with the instructor account</a:t>
             </a:r>
           </a:p>
         </p:txBody>

--- a/docs/AutoGrader.pptx
+++ b/docs/AutoGrader.pptx
@@ -1220,7 +1220,7 @@
           <a:lstStyle/>
           <a:p>
             <a:r>
-              <a:t>Demo plan: open the live site, look at the student side, submit a repository and watch the reviewers run in parallel, then the instructor side: overview, gradebook and an assignment's analytics, and finally the How it works page with the live latency numbers. Thank you; happy to take questions.</a:t>
+              <a:t>Demo plan: open the live site, look at the student side, submit a repository and watch the reviewers run in parallel, then the instructor side: overview, gradebook and an assignment's analytics, and finally the Platform health page with the live latency numbers. Thank you; happy to take questions.</a:t>
             </a:r>
           </a:p>
         </p:txBody>
@@ -6186,7 +6186,7 @@
                 </a:solidFill>
                 <a:latin typeface="Segoe UI"/>
               </a:rPr>
-              <a:t>Platform health and How it works show them live.</a:t>
+              <a:t>The Platform health page shows them live.</a:t>
             </a:r>
           </a:p>
           <a:p>
@@ -9791,7 +9791,7 @@
                 </a:solidFill>
                 <a:latin typeface="Segoe UI"/>
               </a:rPr>
-              <a:t>Claude API (forced tool use) or heuristics</a:t>
+              <a:t>Free Groq models or Claude (forced tool use), or heuristics</a:t>
             </a:r>
           </a:p>
           <a:p>
@@ -11278,7 +11278,7 @@
                 </a:solidFill>
                 <a:latin typeface="Segoe UI"/>
               </a:rPr>
-              <a:t>How it works: architecture and live latency</a:t>
+              <a:t>Platform health: live latency per stage</a:t>
             </a:r>
           </a:p>
         </p:txBody>
@@ -13085,7 +13085,7 @@
                 </a:solidFill>
                 <a:latin typeface="Segoe UI"/>
               </a:rPr>
-              <a:t>Runs on Claude models (LLM mode) or, with no API key, on rule-based scorers through the same pipeline (heuristic mode).</a:t>
+              <a:t>Runs on free AI models (Groq: GPT-OSS 20B and 120B) or Claude, or with no API key on rule-based scorers through the same pipeline (heuristic mode).</a:t>
             </a:r>
           </a:p>
         </p:txBody>
@@ -14103,7 +14103,7 @@
                 </a:solidFill>
                 <a:latin typeface="Segoe UI Semibold"/>
               </a:rPr>
-              <a:t>Claude API</a:t>
+              <a:t>AI model API</a:t>
             </a:r>
           </a:p>
           <a:p>

--- a/docs/AutoGrader.pptx
+++ b/docs/AutoGrader.pptx
@@ -1010,7 +1010,7 @@
           <a:lstStyle/>
           <a:p>
             <a:r>
-              <a:t>The labs let students practise each layer. They are not simulations: the SQL lab runs real queries checked by the server, and the load-balancer lab sends real requests to the replicas.</a:t>
+              <a:t>The labs let students practise each layer. They are not simulations: the SQL lab runs real queries checked by the server, and the load-balancer lab sends real requests to the replicas. The labs page also opens with 'Start here': the next tasks, chosen from the student's weakest graded area, so practice follows their own review. The testing lab is mutation testing - a suite only counts when it fails on the broken versions of the function.</a:t>
             </a:r>
           </a:p>
         </p:txBody>
@@ -5124,7 +5124,7 @@
         <p:spPr>
           <a:xfrm>
             <a:off x="7726679" y="868680"/>
-            <a:ext cx="3931920" cy="2457450"/>
+            <a:ext cx="3931920" cy="10023666"/>
           </a:xfrm>
           <a:prstGeom prst="rect">
             <a:avLst/>
@@ -8891,6 +8891,43 @@
                 <a:latin typeface="Segoe UI"/>
               </a:rPr>
               <a:t>  HTML, CSS and JS editor with a sandboxed live preview and DOM checks.</a:t>
+            </a:r>
+          </a:p>
+          <a:p>
+            <a:pPr>
+              <a:lnSpc>
+                <a:spcPct val="110000"/>
+              </a:lnSpc>
+              <a:spcAft>
+                <a:spcPts val="700"/>
+              </a:spcAft>
+            </a:pPr>
+            <a:r>
+              <a:rPr sz="1350" b="1">
+                <a:solidFill>
+                  <a:srgbClr val="2140D9"/>
+                </a:solidFill>
+                <a:latin typeface="Segoe UI"/>
+              </a:rPr>
+              <a:t>•  </a:t>
+            </a:r>
+            <a:r>
+              <a:rPr sz="1350" b="1">
+                <a:solidFill>
+                  <a:srgbClr val="141C2E"/>
+                </a:solidFill>
+                <a:latin typeface="Segoe UI Semibold"/>
+              </a:rPr>
+              <a:t>Testing:</a:t>
+            </a:r>
+            <a:r>
+              <a:rPr sz="1350" b="0">
+                <a:solidFill>
+                  <a:srgbClr val="4A5468"/>
+                </a:solidFill>
+                <a:latin typeface="Segoe UI"/>
+              </a:rPr>
+              <a:t>  write test cases for a marking function; the server replays them against four seeded bugs.</a:t>
             </a:r>
           </a:p>
           <a:p>

--- a/docs/AutoGrader.pptx
+++ b/docs/AutoGrader.pptx
@@ -5124,7 +5124,7 @@
         <p:spPr>
           <a:xfrm>
             <a:off x="7726679" y="868680"/>
-            <a:ext cx="3931920" cy="10023666"/>
+            <a:ext cx="3931920" cy="2457450"/>
           </a:xfrm>
           <a:prstGeom prst="rect">
             <a:avLst/>
